--- a/session1/exam-strategy/q6/q6_exam_strategy.pptx
+++ b/session1/exam-strategy/q6/q6_exam_strategy.pptx
@@ -3187,8 +3187,8 @@
         </p:nvSpPr>
         <p:spPr>
           <a:xfrm>
-            <a:off x="274320" y="685800"/>
-            <a:ext cx="6400800" cy="1645920"/>
+            <a:off x="274320" y="640080"/>
+            <a:ext cx="6583680" cy="1280160"/>
           </a:xfrm>
           <a:prstGeom prst="rect">
             <a:avLst/>
@@ -3196,13 +3196,13 @@
           <a:noFill/>
         </p:spPr>
         <p:txBody>
-          <a:bodyPr wrap="square">
+          <a:bodyPr wrap="square" tIns="0" bIns="0">
             <a:spAutoFit/>
           </a:bodyPr>
           <a:lstStyle/>
           <a:p>
             <a:pPr>
-              <a:defRPr sz="1100">
+              <a:defRPr sz="900">
                 <a:solidFill>
                   <a:srgbClr val="FFFFFF"/>
                 </a:solidFill>
@@ -3210,7 +3210,7 @@
               </a:defRPr>
             </a:pPr>
             <a:r>
-              <a:t>A security engineer attached the following IAM policy to a developer's IAM user account: { "Version": "2012-10-17", "Statement": { "Effect": "Allow", "Action": "dynamodb:GetItem", "Resource": "*", "Condition": { "DateGreaterThan": { "aws:CurrentTime": "2020-07-01T00:00:00Z" }, "DateLessThan": { "aws:CurrentTime": "2020-12-31T23:59:59Z" }, "StringEquals": { "aws:SourceVpc": "vpc-111bbb22" } } } } Which permission will the developer have for using GetItem?</a:t>
+              <a:t>A security engineer attached the following IAM policy to a developer's IAM user account: { "Version": "2012-10-17", "Statement": { "Effect": "Allow", "Action": "dynamodb:GetItem", "Resource": "*", "Condition": { "DateGreaterThan": { "aws:CurrentTime": "2020-07-01T00:00:00Z" }, "DateLessThan": { "aws:CurrentTime": "2020-12-31T23:59:59Z" }, "Strin...</a:t>
             </a:r>
           </a:p>
         </p:txBody>
@@ -3223,8 +3223,8 @@
         </p:nvSpPr>
         <p:spPr>
           <a:xfrm>
-            <a:off x="365760" y="2377440"/>
-            <a:ext cx="274320" cy="274320"/>
+            <a:off x="274320" y="2057400"/>
+            <a:ext cx="201168" cy="201168"/>
           </a:xfrm>
           <a:prstGeom prst="ellipse">
             <a:avLst/>
@@ -3255,7 +3255,7 @@
           <a:lstStyle/>
           <a:p>
             <a:pPr algn="ctr">
-              <a:defRPr sz="900" b="1">
+              <a:defRPr sz="700" b="1">
                 <a:solidFill>
                   <a:srgbClr val="FFFFFF"/>
                 </a:solidFill>
@@ -3275,8 +3275,8 @@
         </p:nvSpPr>
         <p:spPr>
           <a:xfrm>
-            <a:off x="777240" y="2377440"/>
-            <a:ext cx="5943600" cy="411480"/>
+            <a:off x="548640" y="2011680"/>
+            <a:ext cx="6400800" cy="736092"/>
           </a:xfrm>
           <a:prstGeom prst="rect">
             <a:avLst/>
@@ -3284,13 +3284,13 @@
           <a:noFill/>
         </p:spPr>
         <p:txBody>
-          <a:bodyPr wrap="square">
+          <a:bodyPr wrap="square" tIns="25400" bIns="0" lIns="0">
             <a:spAutoFit/>
           </a:bodyPr>
           <a:lstStyle/>
           <a:p>
             <a:pPr>
-              <a:defRPr sz="1000">
+              <a:defRPr sz="800">
                 <a:solidFill>
                   <a:srgbClr val="CCCCCC"/>
                 </a:solidFill>
@@ -3298,7 +3298,7 @@
               </a:defRPr>
             </a:pPr>
             <a:r>
-              <a:t>Access is allowed on or between July 1, 2020, and December 31, 2020 (UTC), and if the request is initiated from vpc-111bbb22 - This option specifies that access to GetItem is allowed only if the request is initiated from the specified VPC within the specified time frame.</a:t>
+              <a:t>Access is allowed on or between July 1, 2020, and December 31, 2020 (UTC)...</a:t>
             </a:r>
           </a:p>
         </p:txBody>
@@ -3311,8 +3311,8 @@
         </p:nvSpPr>
         <p:spPr>
           <a:xfrm>
-            <a:off x="365760" y="2834640"/>
-            <a:ext cx="274320" cy="274320"/>
+            <a:off x="274320" y="2811780"/>
+            <a:ext cx="201168" cy="201168"/>
           </a:xfrm>
           <a:prstGeom prst="ellipse">
             <a:avLst/>
@@ -3343,7 +3343,7 @@
           <a:lstStyle/>
           <a:p>
             <a:pPr algn="ctr">
-              <a:defRPr sz="900" b="1">
+              <a:defRPr sz="700" b="1">
                 <a:solidFill>
                   <a:srgbClr val="FFFFFF"/>
                 </a:solidFill>
@@ -3363,8 +3363,8 @@
         </p:nvSpPr>
         <p:spPr>
           <a:xfrm>
-            <a:off x="777240" y="2834640"/>
-            <a:ext cx="5943600" cy="411480"/>
+            <a:off x="548640" y="2766060"/>
+            <a:ext cx="6400800" cy="736092"/>
           </a:xfrm>
           <a:prstGeom prst="rect">
             <a:avLst/>
@@ -3372,13 +3372,13 @@
           <a:noFill/>
         </p:spPr>
         <p:txBody>
-          <a:bodyPr wrap="square">
+          <a:bodyPr wrap="square" tIns="25400" bIns="0" lIns="0">
             <a:spAutoFit/>
           </a:bodyPr>
           <a:lstStyle/>
           <a:p>
             <a:pPr>
-              <a:defRPr sz="1000">
+              <a:defRPr sz="800">
                 <a:solidFill>
                   <a:srgbClr val="CCCCCC"/>
                 </a:solidFill>
@@ -3386,7 +3386,7 @@
               </a:defRPr>
             </a:pPr>
             <a:r>
-              <a:t>Access is allowed on or between July 1, 2020, and December 31, 2020 (UTC), or if the request is initiated from vpc-111bbb22 - This option implies that access is granted if either the time condition or the VPC condition is met, which does not align with the IAM policy provided.</a:t>
+              <a:t>Access is allowed on or between July 1, 2020, and December 31, 2020 (UTC)...</a:t>
             </a:r>
           </a:p>
         </p:txBody>
@@ -3399,8 +3399,8 @@
         </p:nvSpPr>
         <p:spPr>
           <a:xfrm>
-            <a:off x="365760" y="3291840"/>
-            <a:ext cx="274320" cy="274320"/>
+            <a:off x="274320" y="3566160"/>
+            <a:ext cx="201168" cy="201168"/>
           </a:xfrm>
           <a:prstGeom prst="ellipse">
             <a:avLst/>
@@ -3431,7 +3431,7 @@
           <a:lstStyle/>
           <a:p>
             <a:pPr algn="ctr">
-              <a:defRPr sz="900" b="1">
+              <a:defRPr sz="700" b="1">
                 <a:solidFill>
                   <a:srgbClr val="FFFFFF"/>
                 </a:solidFill>
@@ -3451,8 +3451,8 @@
         </p:nvSpPr>
         <p:spPr>
           <a:xfrm>
-            <a:off x="777240" y="3291840"/>
-            <a:ext cx="5943600" cy="411480"/>
+            <a:off x="548640" y="3520440"/>
+            <a:ext cx="6400800" cy="736092"/>
           </a:xfrm>
           <a:prstGeom prst="rect">
             <a:avLst/>
@@ -3460,13 +3460,13 @@
           <a:noFill/>
         </p:spPr>
         <p:txBody>
-          <a:bodyPr wrap="square">
+          <a:bodyPr wrap="square" tIns="25400" bIns="0" lIns="0">
             <a:spAutoFit/>
           </a:bodyPr>
           <a:lstStyle/>
           <a:p>
             <a:pPr>
-              <a:defRPr sz="1000">
+              <a:defRPr sz="800">
                 <a:solidFill>
                   <a:srgbClr val="CCCCCC"/>
                 </a:solidFill>
@@ -3474,7 +3474,7 @@
               </a:defRPr>
             </a:pPr>
             <a:r>
-              <a:t>Access is allowed on or between July 1, 2020, and December 31, 2020 (UTC), and if the request uses a VPC endpoint in vpc-111bbb22 - This option introduces the concept of a VPC endpoint, which is not mentioned in the IAM policy.</a:t>
+              <a:t>Access is allowed on or between July 1, 2020, and December 31, 2020 (UTC)...</a:t>
             </a:r>
           </a:p>
         </p:txBody>
@@ -3487,8 +3487,8 @@
         </p:nvSpPr>
         <p:spPr>
           <a:xfrm>
-            <a:off x="365760" y="3749039"/>
-            <a:ext cx="274320" cy="274320"/>
+            <a:off x="274320" y="4320540"/>
+            <a:ext cx="201168" cy="201168"/>
           </a:xfrm>
           <a:prstGeom prst="ellipse">
             <a:avLst/>
@@ -3519,7 +3519,7 @@
           <a:lstStyle/>
           <a:p>
             <a:pPr algn="ctr">
-              <a:defRPr sz="900" b="1">
+              <a:defRPr sz="700" b="1">
                 <a:solidFill>
                   <a:srgbClr val="FFFFFF"/>
                 </a:solidFill>
@@ -3539,8 +3539,8 @@
         </p:nvSpPr>
         <p:spPr>
           <a:xfrm>
-            <a:off x="777240" y="3749039"/>
-            <a:ext cx="5943600" cy="411480"/>
+            <a:off x="548640" y="4274820"/>
+            <a:ext cx="6400800" cy="736092"/>
           </a:xfrm>
           <a:prstGeom prst="rect">
             <a:avLst/>
@@ -3548,13 +3548,13 @@
           <a:noFill/>
         </p:spPr>
         <p:txBody>
-          <a:bodyPr wrap="square">
+          <a:bodyPr wrap="square" tIns="25400" bIns="0" lIns="0">
             <a:spAutoFit/>
           </a:bodyPr>
           <a:lstStyle/>
           <a:p>
             <a:pPr>
-              <a:defRPr sz="1000">
+              <a:defRPr sz="800">
                 <a:solidFill>
                   <a:srgbClr val="CCCCCC"/>
                 </a:solidFill>
@@ -3562,7 +3562,7 @@
               </a:defRPr>
             </a:pPr>
             <a:r>
-              <a:t>Access is allowed on or between July 1, 2020, and December 31, 2020 (UTC), or if the request uses a VPC endpoint in vpc-111bbb22 - Similar to option C, this option also introduces the concept of a VPC endpoint, which is not specified in the IAM policy.</a:t>
+              <a:t>Access is allowed on or between July 1, 2020, and December 31, 2020 (UTC)...</a:t>
             </a:r>
           </a:p>
         </p:txBody>
@@ -3844,8 +3844,8 @@
         </p:blipFill>
         <p:spPr>
           <a:xfrm>
-            <a:off x="182880" y="1466854"/>
-            <a:ext cx="5303520" cy="2735570"/>
+            <a:off x="182880" y="1074011"/>
+            <a:ext cx="5303520" cy="3521256"/>
           </a:xfrm>
           <a:prstGeom prst="rect">
             <a:avLst/>
@@ -3980,9 +3980,9 @@
           <a:p>
             <a:pPr>
               <a:spcAft>
-                <a:spcPts val="600"/>
+                <a:spcPts val="400"/>
               </a:spcAft>
-              <a:defRPr sz="900">
+              <a:defRPr sz="800">
                 <a:solidFill>
                   <a:srgbClr val="212121"/>
                 </a:solidFill>
@@ -3990,7 +3990,7 @@
               </a:defRPr>
             </a:pPr>
             <a:r>
-              <a:t>• Access is allowed on or between July 1, 2020, and December 31, 2020 (UTC), and if the request is initiated from vpc-111bbb22 - This option specifies that access to GetItem is allowed only if the request is initiated from the specified VPC within the specified time frame.</a:t>
+              <a:t>• Access is allowed on or between July 1, 2020, and December 31, 2020 (UTC), and if the request is initiated from vpc-111bbb22 - This option specifies that access to GetItem is allowed only if the request is initiated from the specified VPC within the specified time frame</a:t>
             </a:r>
           </a:p>
         </p:txBody>
@@ -4170,7 +4170,7 @@
         <p:spPr>
           <a:xfrm>
             <a:off x="182880" y="914400"/>
-            <a:ext cx="5280660" cy="3840480"/>
+            <a:ext cx="4595630" cy="3840480"/>
           </a:xfrm>
           <a:prstGeom prst="rect">
             <a:avLst/>
@@ -4305,9 +4305,9 @@
           <a:p>
             <a:pPr>
               <a:spcAft>
-                <a:spcPts val="600"/>
+                <a:spcPts val="400"/>
               </a:spcAft>
-              <a:defRPr sz="900">
+              <a:defRPr sz="800">
                 <a:solidFill>
                   <a:srgbClr val="212121"/>
                 </a:solidFill>
@@ -4315,7 +4315,23 @@
               </a:defRPr>
             </a:pPr>
             <a:r>
-              <a:t>• Access is allowed on or between July 1, 2020, and December 31, 2020 (UTC), or if the request is initiated from vpc-111bbb22 - This option implies that access is granted if either the time condition or the VPC condition is met, which does not align with the IAM policy provided.</a:t>
+              <a:t>• Access is allowed on or between July 1, 2020, and December 31, 2020 (UTC), or if the request is initiated from vpc-111bbb22 - This option implies that access is granted if either the time condition or the VPC condition is met</a:t>
+            </a:r>
+          </a:p>
+          <a:p>
+            <a:pPr>
+              <a:spcAft>
+                <a:spcPts val="400"/>
+              </a:spcAft>
+              <a:defRPr sz="800">
+                <a:solidFill>
+                  <a:srgbClr val="212121"/>
+                </a:solidFill>
+                <a:latin typeface="Segoe UI"/>
+              </a:defRPr>
+            </a:pPr>
+            <a:r>
+              <a:t>• Does not align with the IAM policy provided</a:t>
             </a:r>
           </a:p>
         </p:txBody>
@@ -4495,7 +4511,7 @@
         <p:spPr>
           <a:xfrm>
             <a:off x="182880" y="914400"/>
-            <a:ext cx="5280660" cy="3840480"/>
+            <a:ext cx="4022366" cy="3840480"/>
           </a:xfrm>
           <a:prstGeom prst="rect">
             <a:avLst/>
@@ -4630,9 +4646,9 @@
           <a:p>
             <a:pPr>
               <a:spcAft>
-                <a:spcPts val="600"/>
+                <a:spcPts val="400"/>
               </a:spcAft>
-              <a:defRPr sz="900">
+              <a:defRPr sz="800">
                 <a:solidFill>
                   <a:srgbClr val="212121"/>
                 </a:solidFill>
@@ -4640,7 +4656,23 @@
               </a:defRPr>
             </a:pPr>
             <a:r>
-              <a:t>• Access is allowed on or between July 1, 2020, and December 31, 2020 (UTC), and if the request uses a VPC endpoint in vpc-111bbb22 - This option introduces the concept of a VPC endpoint, which is not mentioned in the IAM policy.</a:t>
+              <a:t>• Access is allowed on or between July 1, 2020, and December 31, 2020 (UTC), and if the request uses a VPC endpoint in vpc-111bbb22 - This option introduces the concept of a VPC endpoint</a:t>
+            </a:r>
+          </a:p>
+          <a:p>
+            <a:pPr>
+              <a:spcAft>
+                <a:spcPts val="400"/>
+              </a:spcAft>
+              <a:defRPr sz="800">
+                <a:solidFill>
+                  <a:srgbClr val="212121"/>
+                </a:solidFill>
+                <a:latin typeface="Segoe UI"/>
+              </a:defRPr>
+            </a:pPr>
+            <a:r>
+              <a:t>• Is not mentioned in the IAM policy</a:t>
             </a:r>
           </a:p>
         </p:txBody>
@@ -4820,7 +4852,7 @@
         <p:spPr>
           <a:xfrm>
             <a:off x="182880" y="914400"/>
-            <a:ext cx="5280660" cy="3840480"/>
+            <a:ext cx="3681685" cy="3840480"/>
           </a:xfrm>
           <a:prstGeom prst="rect">
             <a:avLst/>
@@ -4955,9 +4987,9 @@
           <a:p>
             <a:pPr>
               <a:spcAft>
-                <a:spcPts val="600"/>
+                <a:spcPts val="400"/>
               </a:spcAft>
-              <a:defRPr sz="900">
+              <a:defRPr sz="800">
                 <a:solidFill>
                   <a:srgbClr val="212121"/>
                 </a:solidFill>
@@ -4965,7 +4997,23 @@
               </a:defRPr>
             </a:pPr>
             <a:r>
-              <a:t>• Access is allowed on or between July 1, 2020, and December 31, 2020 (UTC), or if the request uses a VPC endpoint in vpc-111bbb22 - Similar to option C, this option also introduces the concept of a VPC endpoint, which is not specified in the IAM policy.</a:t>
+              <a:t>• Access is allowed on or between July 1, 2020, and December 31, 2020 (UTC), or if the request uses a VPC endpoint in vpc-111bbb22 - Similar to option C, this option also introduces the concept of a VPC endpoint</a:t>
+            </a:r>
+          </a:p>
+          <a:p>
+            <a:pPr>
+              <a:spcAft>
+                <a:spcPts val="400"/>
+              </a:spcAft>
+              <a:defRPr sz="800">
+                <a:solidFill>
+                  <a:srgbClr val="212121"/>
+                </a:solidFill>
+                <a:latin typeface="Segoe UI"/>
+              </a:defRPr>
+            </a:pPr>
+            <a:r>
+              <a:t>• Is not specified in the IAM policy</a:t>
             </a:r>
           </a:p>
         </p:txBody>

--- a/session1/exam-strategy/q6/q6_exam_strategy.pptx
+++ b/session1/exam-strategy/q6/q6_exam_strategy.pptx
@@ -3187,8 +3187,8 @@
         </p:nvSpPr>
         <p:spPr>
           <a:xfrm>
-            <a:off x="274320" y="640080"/>
-            <a:ext cx="6583680" cy="1280160"/>
+            <a:off x="274320" y="685800"/>
+            <a:ext cx="6400800" cy="1645920"/>
           </a:xfrm>
           <a:prstGeom prst="rect">
             <a:avLst/>
@@ -3196,13 +3196,13 @@
           <a:noFill/>
         </p:spPr>
         <p:txBody>
-          <a:bodyPr wrap="square" tIns="0" bIns="0">
+          <a:bodyPr wrap="square">
             <a:spAutoFit/>
           </a:bodyPr>
           <a:lstStyle/>
           <a:p>
             <a:pPr>
-              <a:defRPr sz="900">
+              <a:defRPr sz="1100">
                 <a:solidFill>
                   <a:srgbClr val="FFFFFF"/>
                 </a:solidFill>
@@ -3210,7 +3210,7 @@
               </a:defRPr>
             </a:pPr>
             <a:r>
-              <a:t>A security engineer attached the following IAM policy to a developer's IAM user account: { "Version": "2012-10-17", "Statement": { "Effect": "Allow", "Action": "dynamodb:GetItem", "Resource": "*", "Condition": { "DateGreaterThan": { "aws:CurrentTime": "2020-07-01T00:00:00Z" }, "DateLessThan": { "aws:CurrentTime": "2020-12-31T23:59:59Z" }, "Strin...</a:t>
+              <a:t>A security engineer attached the following IAM policy to a developer's IAM user account: { "Version": "2012-10-17", "Statement": { "Effect": "Allow", "Action": "dynamodb:GetItem", "Resource": "*", "Condition": { "DateGreaterThan": { "aws:CurrentTime": "2020-07-01T00:00:00Z" }, "DateLessThan": { "aws:CurrentTime": "2020-12-31T23:59:59Z" }, "StringEquals": { "aws:SourceVpc": "vpc-111bbb22" } } } } Which permission will the developer have for using GetItem?</a:t>
             </a:r>
           </a:p>
         </p:txBody>
@@ -3223,8 +3223,8 @@
         </p:nvSpPr>
         <p:spPr>
           <a:xfrm>
-            <a:off x="274320" y="2057400"/>
-            <a:ext cx="201168" cy="201168"/>
+            <a:off x="365760" y="2377440"/>
+            <a:ext cx="274320" cy="274320"/>
           </a:xfrm>
           <a:prstGeom prst="ellipse">
             <a:avLst/>
@@ -3255,7 +3255,7 @@
           <a:lstStyle/>
           <a:p>
             <a:pPr algn="ctr">
-              <a:defRPr sz="700" b="1">
+              <a:defRPr sz="900" b="1">
                 <a:solidFill>
                   <a:srgbClr val="FFFFFF"/>
                 </a:solidFill>
@@ -3275,8 +3275,8 @@
         </p:nvSpPr>
         <p:spPr>
           <a:xfrm>
-            <a:off x="548640" y="2011680"/>
-            <a:ext cx="6400800" cy="736092"/>
+            <a:off x="777240" y="2377440"/>
+            <a:ext cx="5943600" cy="411480"/>
           </a:xfrm>
           <a:prstGeom prst="rect">
             <a:avLst/>
@@ -3284,13 +3284,13 @@
           <a:noFill/>
         </p:spPr>
         <p:txBody>
-          <a:bodyPr wrap="square" tIns="25400" bIns="0" lIns="0">
+          <a:bodyPr wrap="square">
             <a:spAutoFit/>
           </a:bodyPr>
           <a:lstStyle/>
           <a:p>
             <a:pPr>
-              <a:defRPr sz="800">
+              <a:defRPr sz="1000">
                 <a:solidFill>
                   <a:srgbClr val="CCCCCC"/>
                 </a:solidFill>
@@ -3298,7 +3298,7 @@
               </a:defRPr>
             </a:pPr>
             <a:r>
-              <a:t>Access is allowed on or between July 1, 2020, and December 31, 2020 (UTC)...</a:t>
+              <a:t>Access is allowed on or between July 1, 2020, and December 31, 2020 (UTC), and if the request is initiated from vpc-111bbb22 - This option specifies that access to GetItem is allowed only if the request is initiated from the specified VPC within the specified time frame.</a:t>
             </a:r>
           </a:p>
         </p:txBody>
@@ -3311,8 +3311,8 @@
         </p:nvSpPr>
         <p:spPr>
           <a:xfrm>
-            <a:off x="274320" y="2811780"/>
-            <a:ext cx="201168" cy="201168"/>
+            <a:off x="365760" y="2834640"/>
+            <a:ext cx="274320" cy="274320"/>
           </a:xfrm>
           <a:prstGeom prst="ellipse">
             <a:avLst/>
@@ -3343,7 +3343,7 @@
           <a:lstStyle/>
           <a:p>
             <a:pPr algn="ctr">
-              <a:defRPr sz="700" b="1">
+              <a:defRPr sz="900" b="1">
                 <a:solidFill>
                   <a:srgbClr val="FFFFFF"/>
                 </a:solidFill>
@@ -3363,8 +3363,8 @@
         </p:nvSpPr>
         <p:spPr>
           <a:xfrm>
-            <a:off x="548640" y="2766060"/>
-            <a:ext cx="6400800" cy="736092"/>
+            <a:off x="777240" y="2834640"/>
+            <a:ext cx="5943600" cy="411480"/>
           </a:xfrm>
           <a:prstGeom prst="rect">
             <a:avLst/>
@@ -3372,13 +3372,13 @@
           <a:noFill/>
         </p:spPr>
         <p:txBody>
-          <a:bodyPr wrap="square" tIns="25400" bIns="0" lIns="0">
+          <a:bodyPr wrap="square">
             <a:spAutoFit/>
           </a:bodyPr>
           <a:lstStyle/>
           <a:p>
             <a:pPr>
-              <a:defRPr sz="800">
+              <a:defRPr sz="1000">
                 <a:solidFill>
                   <a:srgbClr val="CCCCCC"/>
                 </a:solidFill>
@@ -3386,7 +3386,7 @@
               </a:defRPr>
             </a:pPr>
             <a:r>
-              <a:t>Access is allowed on or between July 1, 2020, and December 31, 2020 (UTC)...</a:t>
+              <a:t>Access is allowed on or between July 1, 2020, and December 31, 2020 (UTC), or if the request is initiated from vpc-111bbb22 - This option implies that access is granted if either the time condition or the VPC condition is met, which does not align with the IAM policy provided.</a:t>
             </a:r>
           </a:p>
         </p:txBody>
@@ -3399,8 +3399,8 @@
         </p:nvSpPr>
         <p:spPr>
           <a:xfrm>
-            <a:off x="274320" y="3566160"/>
-            <a:ext cx="201168" cy="201168"/>
+            <a:off x="365760" y="3291840"/>
+            <a:ext cx="274320" cy="274320"/>
           </a:xfrm>
           <a:prstGeom prst="ellipse">
             <a:avLst/>
@@ -3431,7 +3431,7 @@
           <a:lstStyle/>
           <a:p>
             <a:pPr algn="ctr">
-              <a:defRPr sz="700" b="1">
+              <a:defRPr sz="900" b="1">
                 <a:solidFill>
                   <a:srgbClr val="FFFFFF"/>
                 </a:solidFill>
@@ -3451,8 +3451,8 @@
         </p:nvSpPr>
         <p:spPr>
           <a:xfrm>
-            <a:off x="548640" y="3520440"/>
-            <a:ext cx="6400800" cy="736092"/>
+            <a:off x="777240" y="3291840"/>
+            <a:ext cx="5943600" cy="411480"/>
           </a:xfrm>
           <a:prstGeom prst="rect">
             <a:avLst/>
@@ -3460,13 +3460,13 @@
           <a:noFill/>
         </p:spPr>
         <p:txBody>
-          <a:bodyPr wrap="square" tIns="25400" bIns="0" lIns="0">
+          <a:bodyPr wrap="square">
             <a:spAutoFit/>
           </a:bodyPr>
           <a:lstStyle/>
           <a:p>
             <a:pPr>
-              <a:defRPr sz="800">
+              <a:defRPr sz="1000">
                 <a:solidFill>
                   <a:srgbClr val="CCCCCC"/>
                 </a:solidFill>
@@ -3474,7 +3474,7 @@
               </a:defRPr>
             </a:pPr>
             <a:r>
-              <a:t>Access is allowed on or between July 1, 2020, and December 31, 2020 (UTC)...</a:t>
+              <a:t>Access is allowed on or between July 1, 2020, and December 31, 2020 (UTC), and if the request uses a VPC endpoint in vpc-111bbb22 - This option introduces the concept of a VPC endpoint, which is not mentioned in the IAM policy.</a:t>
             </a:r>
           </a:p>
         </p:txBody>
@@ -3487,8 +3487,8 @@
         </p:nvSpPr>
         <p:spPr>
           <a:xfrm>
-            <a:off x="274320" y="4320540"/>
-            <a:ext cx="201168" cy="201168"/>
+            <a:off x="365760" y="3749039"/>
+            <a:ext cx="274320" cy="274320"/>
           </a:xfrm>
           <a:prstGeom prst="ellipse">
             <a:avLst/>
@@ -3519,7 +3519,7 @@
           <a:lstStyle/>
           <a:p>
             <a:pPr algn="ctr">
-              <a:defRPr sz="700" b="1">
+              <a:defRPr sz="900" b="1">
                 <a:solidFill>
                   <a:srgbClr val="FFFFFF"/>
                 </a:solidFill>
@@ -3539,8 +3539,8 @@
         </p:nvSpPr>
         <p:spPr>
           <a:xfrm>
-            <a:off x="548640" y="4274820"/>
-            <a:ext cx="6400800" cy="736092"/>
+            <a:off x="777240" y="3749039"/>
+            <a:ext cx="5943600" cy="411480"/>
           </a:xfrm>
           <a:prstGeom prst="rect">
             <a:avLst/>
@@ -3548,13 +3548,13 @@
           <a:noFill/>
         </p:spPr>
         <p:txBody>
-          <a:bodyPr wrap="square" tIns="25400" bIns="0" lIns="0">
+          <a:bodyPr wrap="square">
             <a:spAutoFit/>
           </a:bodyPr>
           <a:lstStyle/>
           <a:p>
             <a:pPr>
-              <a:defRPr sz="800">
+              <a:defRPr sz="1000">
                 <a:solidFill>
                   <a:srgbClr val="CCCCCC"/>
                 </a:solidFill>
@@ -3562,7 +3562,7 @@
               </a:defRPr>
             </a:pPr>
             <a:r>
-              <a:t>Access is allowed on or between July 1, 2020, and December 31, 2020 (UTC)...</a:t>
+              <a:t>Access is allowed on or between July 1, 2020, and December 31, 2020 (UTC), or if the request uses a VPC endpoint in vpc-111bbb22 - Similar to option C, this option also introduces the concept of a VPC endpoint, which is not specified in the IAM policy.</a:t>
             </a:r>
           </a:p>
         </p:txBody>
@@ -3844,8 +3844,8 @@
         </p:blipFill>
         <p:spPr>
           <a:xfrm>
-            <a:off x="182880" y="1074011"/>
-            <a:ext cx="5303520" cy="3521256"/>
+            <a:off x="182880" y="914400"/>
+            <a:ext cx="4318425" cy="3840480"/>
           </a:xfrm>
           <a:prstGeom prst="rect">
             <a:avLst/>
@@ -3980,9 +3980,9 @@
           <a:p>
             <a:pPr>
               <a:spcAft>
-                <a:spcPts val="400"/>
+                <a:spcPts val="600"/>
               </a:spcAft>
-              <a:defRPr sz="800">
+              <a:defRPr sz="900">
                 <a:solidFill>
                   <a:srgbClr val="212121"/>
                 </a:solidFill>
@@ -3990,7 +3990,7 @@
               </a:defRPr>
             </a:pPr>
             <a:r>
-              <a:t>• Access is allowed on or between July 1, 2020, and December 31, 2020 (UTC), and if the request is initiated from vpc-111bbb22 - This option specifies that access to GetItem is allowed only if the request is initiated from the specified VPC within the specified time frame</a:t>
+              <a:t>• Access is allowed on or between July 1, 2020, and December 31, 2020 (UTC), and if the request is initiated from vpc-111bbb22 - This option specifies that access to GetItem is allowed only if the request is initiated from the specified VPC within the specified time frame.</a:t>
             </a:r>
           </a:p>
         </p:txBody>
@@ -4170,7 +4170,7 @@
         <p:spPr>
           <a:xfrm>
             <a:off x="182880" y="914400"/>
-            <a:ext cx="4595630" cy="3840480"/>
+            <a:ext cx="4918024" cy="3840480"/>
           </a:xfrm>
           <a:prstGeom prst="rect">
             <a:avLst/>
@@ -4305,9 +4305,9 @@
           <a:p>
             <a:pPr>
               <a:spcAft>
-                <a:spcPts val="400"/>
+                <a:spcPts val="600"/>
               </a:spcAft>
-              <a:defRPr sz="800">
+              <a:defRPr sz="900">
                 <a:solidFill>
                   <a:srgbClr val="212121"/>
                 </a:solidFill>
@@ -4315,23 +4315,7 @@
               </a:defRPr>
             </a:pPr>
             <a:r>
-              <a:t>• Access is allowed on or between July 1, 2020, and December 31, 2020 (UTC), or if the request is initiated from vpc-111bbb22 - This option implies that access is granted if either the time condition or the VPC condition is met</a:t>
-            </a:r>
-          </a:p>
-          <a:p>
-            <a:pPr>
-              <a:spcAft>
-                <a:spcPts val="400"/>
-              </a:spcAft>
-              <a:defRPr sz="800">
-                <a:solidFill>
-                  <a:srgbClr val="212121"/>
-                </a:solidFill>
-                <a:latin typeface="Segoe UI"/>
-              </a:defRPr>
-            </a:pPr>
-            <a:r>
-              <a:t>• Does not align with the IAM policy provided</a:t>
+              <a:t>• Access is allowed on or between July 1, 2020, and December 31, 2020 (UTC), or if the request is initiated from vpc-111bbb22 - This option implies that access is granted if either the time condition or the VPC condition is met, which does not align with the IAM policy provided.</a:t>
             </a:r>
           </a:p>
         </p:txBody>
@@ -4511,7 +4495,7 @@
         <p:spPr>
           <a:xfrm>
             <a:off x="182880" y="914400"/>
-            <a:ext cx="4022366" cy="3840480"/>
+            <a:ext cx="4692879" cy="3840480"/>
           </a:xfrm>
           <a:prstGeom prst="rect">
             <a:avLst/>
@@ -4646,9 +4630,9 @@
           <a:p>
             <a:pPr>
               <a:spcAft>
-                <a:spcPts val="400"/>
+                <a:spcPts val="600"/>
               </a:spcAft>
-              <a:defRPr sz="800">
+              <a:defRPr sz="900">
                 <a:solidFill>
                   <a:srgbClr val="212121"/>
                 </a:solidFill>
@@ -4656,23 +4640,7 @@
               </a:defRPr>
             </a:pPr>
             <a:r>
-              <a:t>• Access is allowed on or between July 1, 2020, and December 31, 2020 (UTC), and if the request uses a VPC endpoint in vpc-111bbb22 - This option introduces the concept of a VPC endpoint</a:t>
-            </a:r>
-          </a:p>
-          <a:p>
-            <a:pPr>
-              <a:spcAft>
-                <a:spcPts val="400"/>
-              </a:spcAft>
-              <a:defRPr sz="800">
-                <a:solidFill>
-                  <a:srgbClr val="212121"/>
-                </a:solidFill>
-                <a:latin typeface="Segoe UI"/>
-              </a:defRPr>
-            </a:pPr>
-            <a:r>
-              <a:t>• Is not mentioned in the IAM policy</a:t>
+              <a:t>• Access is allowed on or between July 1, 2020, and December 31, 2020 (UTC), and if the request uses a VPC endpoint in vpc-111bbb22 - This option introduces the concept of a VPC endpoint, which is not mentioned in the IAM policy.</a:t>
             </a:r>
           </a:p>
         </p:txBody>
@@ -4852,7 +4820,7 @@
         <p:spPr>
           <a:xfrm>
             <a:off x="182880" y="914400"/>
-            <a:ext cx="3681685" cy="3840480"/>
+            <a:ext cx="5086306" cy="3840480"/>
           </a:xfrm>
           <a:prstGeom prst="rect">
             <a:avLst/>
@@ -4987,9 +4955,9 @@
           <a:p>
             <a:pPr>
               <a:spcAft>
-                <a:spcPts val="400"/>
+                <a:spcPts val="600"/>
               </a:spcAft>
-              <a:defRPr sz="800">
+              <a:defRPr sz="900">
                 <a:solidFill>
                   <a:srgbClr val="212121"/>
                 </a:solidFill>
@@ -4997,23 +4965,7 @@
               </a:defRPr>
             </a:pPr>
             <a:r>
-              <a:t>• Access is allowed on or between July 1, 2020, and December 31, 2020 (UTC), or if the request uses a VPC endpoint in vpc-111bbb22 - Similar to option C, this option also introduces the concept of a VPC endpoint</a:t>
-            </a:r>
-          </a:p>
-          <a:p>
-            <a:pPr>
-              <a:spcAft>
-                <a:spcPts val="400"/>
-              </a:spcAft>
-              <a:defRPr sz="800">
-                <a:solidFill>
-                  <a:srgbClr val="212121"/>
-                </a:solidFill>
-                <a:latin typeface="Segoe UI"/>
-              </a:defRPr>
-            </a:pPr>
-            <a:r>
-              <a:t>• Is not specified in the IAM policy</a:t>
+              <a:t>• Access is allowed on or between July 1, 2020, and December 31, 2020 (UTC), or if the request uses a VPC endpoint in vpc-111bbb22 - Similar to option C, this option also introduces the concept of a VPC endpoint, which is not specified in the IAM policy.</a:t>
             </a:r>
           </a:p>
         </p:txBody>
